--- a/presentation/vk_predict_cmc.pptx
+++ b/presentation/vk_predict_cmc.pptx
@@ -8425,32 +8425,25 @@
           <a:lstStyle/>
           <a:p>
             <a:r>
-              <a:rPr sz="1500" b="1">
-                <a:solidFill>
-                  <a:srgbClr val="0B1F4D"/>
+              <a:rPr b="1" sz="1400">
+                <a:solidFill>
+                  <a:srgbClr val="061A4D"/>
                 </a:solidFill>
                 <a:latin typeface="Arial"/>
               </a:rPr>
               <a:t>Идея</a:t>
             </a:r>
           </a:p>
-          <a:p>
-            <a:endParaRPr sz="1500" b="1">
-              <a:solidFill>
-                <a:srgbClr val="0B1F4D"/>
-              </a:solidFill>
-              <a:latin typeface="Arial"/>
-            </a:endParaRPr>
-          </a:p>
-          <a:p>
-            <a:r>
-              <a:rPr sz="1500" b="0">
-                <a:solidFill>
-                  <a:srgbClr val="0B1F4D"/>
-                </a:solidFill>
-                <a:latin typeface="Arial"/>
-              </a:rPr>
-              <a:t>Одиночные модели ошибаются по-разному: CatBoost, LightGBM, XGBoost и линейные модели ловят разные части сигнала. Поэтому мы смешивали их probability- и rank-предсказания.</a:t>
+          <a:p/>
+          <a:p>
+            <a:r>
+              <a:rPr sz="1200">
+                <a:solidFill>
+                  <a:srgbClr val="061A4D"/>
+                </a:solidFill>
+                <a:latin typeface="Arial"/>
+              </a:rPr>
+              <a:t>Одиночные модели ошибаются по-разному: LightGBM-варианты, XGBoost, CatBoost, FLAML и ExtraTrees ловят разные части сигнала. Поэтому мы смешивали probability- и rank-предсказания.</a:t>
             </a:r>
           </a:p>
         </p:txBody>
@@ -8478,72 +8471,54 @@
           <a:lstStyle/>
           <a:p>
             <a:r>
-              <a:rPr sz="1500" b="1">
-                <a:solidFill>
-                  <a:srgbClr val="0B1F4D"/>
-                </a:solidFill>
-                <a:latin typeface="Arial"/>
-              </a:rPr>
-              <a:t>Как подбирали веса</a:t>
-            </a:r>
-          </a:p>
-          <a:p>
-            <a:endParaRPr sz="1500" b="1">
-              <a:solidFill>
-                <a:srgbClr val="0B1F4D"/>
-              </a:solidFill>
-              <a:latin typeface="Arial"/>
-            </a:endParaRPr>
-          </a:p>
-          <a:p>
-            <a:r>
-              <a:rPr sz="1500" b="0">
-                <a:solidFill>
-                  <a:srgbClr val="0B1F4D"/>
-                </a:solidFill>
-                <a:latin typeface="Arial"/>
-              </a:rPr>
-              <a:t>• equal blend как baseline</a:t>
-            </a:r>
-          </a:p>
-          <a:p>
-            <a:r>
-              <a:rPr sz="1500" b="0">
-                <a:solidFill>
-                  <a:srgbClr val="0B1F4D"/>
-                </a:solidFill>
-                <a:latin typeface="Arial"/>
-              </a:rPr>
-              <a:t>• AUC-weighted blend</a:t>
-            </a:r>
-          </a:p>
-          <a:p>
-            <a:r>
-              <a:rPr sz="1500" b="0">
-                <a:solidFill>
-                  <a:srgbClr val="0B1F4D"/>
-                </a:solidFill>
-                <a:latin typeface="Arial"/>
-              </a:rPr>
-              <a:t>• ручные веса</a:t>
-            </a:r>
-          </a:p>
-          <a:p>
-            <a:r>
-              <a:rPr sz="1500" b="0">
-                <a:solidFill>
-                  <a:srgbClr val="0B1F4D"/>
-                </a:solidFill>
-                <a:latin typeface="Arial"/>
-              </a:rPr>
-              <a:t>• random search по OOF</a:t>
-            </a:r>
-          </a:p>
-          <a:p>
-            <a:r>
-              <a:rPr sz="1500" b="0">
-                <a:solidFill>
-                  <a:srgbClr val="0B1F4D"/>
+              <a:rPr b="1" sz="1400">
+                <a:solidFill>
+                  <a:srgbClr val="061A4D"/>
+                </a:solidFill>
+                <a:latin typeface="Arial"/>
+              </a:rPr>
+              <a:t>Как комбинировали</a:t>
+            </a:r>
+          </a:p>
+          <a:p/>
+          <a:p>
+            <a:r>
+              <a:rPr sz="1200">
+                <a:solidFill>
+                  <a:srgbClr val="061A4D"/>
+                </a:solidFill>
+                <a:latin typeface="Arial"/>
+              </a:rPr>
+              <a:t>• probability blend: среднее / взвешенное среднее прогнозов</a:t>
+            </a:r>
+          </a:p>
+          <a:p>
+            <a:r>
+              <a:rPr sz="1200">
+                <a:solidFill>
+                  <a:srgbClr val="061A4D"/>
+                </a:solidFill>
+                <a:latin typeface="Arial"/>
+              </a:rPr>
+              <a:t>• rank blend: усреднение порядков объектов</a:t>
+            </a:r>
+          </a:p>
+          <a:p>
+            <a:r>
+              <a:rPr sz="1200">
+                <a:solidFill>
+                  <a:srgbClr val="061A4D"/>
+                </a:solidFill>
+                <a:latin typeface="Arial"/>
+              </a:rPr>
+              <a:t>• random search весов по OOF</a:t>
+            </a:r>
+          </a:p>
+          <a:p>
+            <a:r>
+              <a:rPr sz="1200">
+                <a:solidFill>
+                  <a:srgbClr val="061A4D"/>
                 </a:solidFill>
                 <a:latin typeface="Arial"/>
               </a:rPr>
@@ -8877,13 +8852,13 @@
           <a:lstStyle/>
           <a:p>
             <a:r>
-              <a:rPr sz="1400">
-                <a:solidFill>
-                  <a:srgbClr val="02205B"/>
-                </a:solidFill>
-                <a:latin typeface="Arial"/>
-              </a:rPr>
-              <a:t>Локальная валидация использовалась как относительный фильтр. Финальные кандидаты сравнивали по private/public: лучшие комбинации поднялись примерно до 0.704 private.</a:t>
+              <a:rPr sz="1200">
+                <a:solidFill>
+                  <a:srgbClr val="061A4D"/>
+                </a:solidFill>
+                <a:latin typeface="Arial"/>
+              </a:rPr>
+              <a:t>На слайде указаны не имена файлов, а состав ансамблей: какие семейства моделей смешивались и каким способом. Лучшие финальные комбинации вышли в район 0.704 private.</a:t>
             </a:r>
           </a:p>
         </p:txBody>
@@ -8915,18 +8890,18 @@
               <a:tr h="406400">
                 <a:tc>
                   <a:txBody>
-                    <a:bodyPr anchor="ctr" wrap="square"/>
+                    <a:bodyPr anchor="ctr" wrap="square" lIns="38100" rIns="38100" tIns="12700" bIns="12700"/>
                     <a:lstStyle/>
                     <a:p>
                       <a:pPr algn="ctr"/>
                       <a:r>
-                        <a:rPr sz="980" b="1">
+                        <a:rPr sz="1150" b="1">
                           <a:solidFill>
-                            <a:srgbClr val="02205B"/>
+                            <a:srgbClr val="061A4D"/>
                           </a:solidFill>
                           <a:latin typeface="Arial"/>
                         </a:rPr>
-                        <a:t>Submission / комбинация</a:t>
+                        <a:t>Комбинация моделей</a:t>
                       </a:r>
                     </a:p>
                   </a:txBody>
@@ -8938,14 +8913,14 @@
                 </a:tc>
                 <a:tc>
                   <a:txBody>
-                    <a:bodyPr anchor="ctr" wrap="square"/>
+                    <a:bodyPr anchor="ctr" wrap="square" lIns="38100" rIns="38100" tIns="12700" bIns="12700"/>
                     <a:lstStyle/>
                     <a:p>
                       <a:pPr algn="ctr"/>
                       <a:r>
-                        <a:rPr sz="980" b="1">
+                        <a:rPr sz="1150" b="1">
                           <a:solidFill>
-                            <a:srgbClr val="02205B"/>
+                            <a:srgbClr val="061A4D"/>
                           </a:solidFill>
                           <a:latin typeface="Arial"/>
                         </a:rPr>
@@ -8961,14 +8936,14 @@
                 </a:tc>
                 <a:tc>
                   <a:txBody>
-                    <a:bodyPr anchor="ctr" wrap="square"/>
+                    <a:bodyPr anchor="ctr" wrap="square" lIns="38100" rIns="38100" tIns="12700" bIns="12700"/>
                     <a:lstStyle/>
                     <a:p>
                       <a:pPr algn="ctr"/>
                       <a:r>
-                        <a:rPr sz="980" b="1">
+                        <a:rPr sz="1150" b="1">
                           <a:solidFill>
-                            <a:srgbClr val="02205B"/>
+                            <a:srgbClr val="061A4D"/>
                           </a:solidFill>
                           <a:latin typeface="Arial"/>
                         </a:rPr>
@@ -8984,18 +8959,18 @@
                 </a:tc>
                 <a:tc>
                   <a:txBody>
-                    <a:bodyPr anchor="ctr" wrap="square"/>
+                    <a:bodyPr anchor="ctr" wrap="square" lIns="38100" rIns="38100" tIns="12700" bIns="12700"/>
                     <a:lstStyle/>
                     <a:p>
                       <a:pPr algn="ctr"/>
                       <a:r>
-                        <a:rPr sz="980" b="1">
+                        <a:rPr sz="1150" b="1">
                           <a:solidFill>
-                            <a:srgbClr val="02205B"/>
+                            <a:srgbClr val="061A4D"/>
                           </a:solidFill>
                           <a:latin typeface="Arial"/>
                         </a:rPr>
-                        <a:t>Комментарий</a:t>
+                        <a:t>Способ смешивания</a:t>
                       </a:r>
                     </a:p>
                   </a:txBody>
@@ -9009,18 +8984,18 @@
               <a:tr h="406400">
                 <a:tc>
                   <a:txBody>
-                    <a:bodyPr anchor="ctr" wrap="square"/>
+                    <a:bodyPr anchor="ctr" wrap="square" lIns="38100" rIns="38100" tIns="12700" bIns="12700"/>
                     <a:lstStyle/>
                     <a:p>
                       <a:pPr algn="l"/>
                       <a:r>
-                        <a:rPr sz="940" b="1">
+                        <a:rPr sz="1050" b="1">
                           <a:solidFill>
-                            <a:srgbClr val="02205B"/>
+                            <a:srgbClr val="061A4D"/>
                           </a:solidFill>
                           <a:latin typeface="Arial"/>
                         </a:rPr>
-                        <a:t>final_combo_best_private</a:t>
+                        <a:t>LightGBM variants + XGBoost + CatBoost + ExtraTrees</a:t>
                       </a:r>
                     </a:p>
                   </a:txBody>
@@ -9032,14 +9007,14 @@
                 </a:tc>
                 <a:tc>
                   <a:txBody>
-                    <a:bodyPr anchor="ctr" wrap="square"/>
+                    <a:bodyPr anchor="ctr" wrap="square" lIns="38100" rIns="38100" tIns="12700" bIns="12700"/>
                     <a:lstStyle/>
                     <a:p>
                       <a:pPr algn="ctr"/>
                       <a:r>
-                        <a:rPr sz="940" b="0">
+                        <a:rPr sz="1050" b="0">
                           <a:solidFill>
-                            <a:srgbClr val="02205B"/>
+                            <a:srgbClr val="061A4D"/>
                           </a:solidFill>
                           <a:latin typeface="Arial"/>
                         </a:rPr>
@@ -9055,14 +9030,14 @@
                 </a:tc>
                 <a:tc>
                   <a:txBody>
-                    <a:bodyPr anchor="ctr" wrap="square"/>
+                    <a:bodyPr anchor="ctr" wrap="square" lIns="38100" rIns="38100" tIns="12700" bIns="12700"/>
                     <a:lstStyle/>
                     <a:p>
                       <a:pPr algn="ctr"/>
                       <a:r>
-                        <a:rPr sz="940" b="0">
+                        <a:rPr sz="1050" b="0">
                           <a:solidFill>
-                            <a:srgbClr val="02205B"/>
+                            <a:srgbClr val="061A4D"/>
                           </a:solidFill>
                           <a:latin typeface="Arial"/>
                         </a:rPr>
@@ -9078,18 +9053,18 @@
                 </a:tc>
                 <a:tc>
                   <a:txBody>
-                    <a:bodyPr anchor="ctr" wrap="square"/>
+                    <a:bodyPr anchor="ctr" wrap="square" lIns="38100" rIns="38100" tIns="12700" bIns="12700"/>
                     <a:lstStyle/>
                     <a:p>
                       <a:pPr algn="l"/>
                       <a:r>
-                        <a:rPr sz="940" b="0">
+                        <a:rPr sz="1050" b="0">
                           <a:solidFill>
-                            <a:srgbClr val="02205B"/>
+                            <a:srgbClr val="061A4D"/>
                           </a:solidFill>
                           <a:latin typeface="Arial"/>
                         </a:rPr>
-                        <a:t>лучший private из финальных</a:t>
+                        <a:t>probability blend, веса по validation</a:t>
                       </a:r>
                     </a:p>
                   </a:txBody>
@@ -9103,18 +9078,18 @@
               <a:tr h="406400">
                 <a:tc>
                   <a:txBody>
-                    <a:bodyPr anchor="ctr" wrap="square"/>
+                    <a:bodyPr anchor="ctr" wrap="square" lIns="38100" rIns="38100" tIns="12700" bIns="12700"/>
                     <a:lstStyle/>
                     <a:p>
                       <a:pPr algn="l"/>
                       <a:r>
-                        <a:rPr sz="940" b="1">
+                        <a:rPr sz="1050" b="1">
                           <a:solidFill>
-                            <a:srgbClr val="02205B"/>
+                            <a:srgbClr val="061A4D"/>
                           </a:solidFill>
                           <a:latin typeface="Arial"/>
                         </a:rPr>
-                        <a:t>final_combo_stable_public</a:t>
+                        <a:t>LightGBM variants + XGBoost + CatBoost + FLAML</a:t>
                       </a:r>
                     </a:p>
                   </a:txBody>
@@ -9126,14 +9101,14 @@
                 </a:tc>
                 <a:tc>
                   <a:txBody>
-                    <a:bodyPr anchor="ctr" wrap="square"/>
+                    <a:bodyPr anchor="ctr" wrap="square" lIns="38100" rIns="38100" tIns="12700" bIns="12700"/>
                     <a:lstStyle/>
                     <a:p>
                       <a:pPr algn="ctr"/>
                       <a:r>
-                        <a:rPr sz="940" b="0">
+                        <a:rPr sz="1050" b="0">
                           <a:solidFill>
-                            <a:srgbClr val="02205B"/>
+                            <a:srgbClr val="061A4D"/>
                           </a:solidFill>
                           <a:latin typeface="Arial"/>
                         </a:rPr>
@@ -9149,14 +9124,14 @@
                 </a:tc>
                 <a:tc>
                   <a:txBody>
-                    <a:bodyPr anchor="ctr" wrap="square"/>
+                    <a:bodyPr anchor="ctr" wrap="square" lIns="38100" rIns="38100" tIns="12700" bIns="12700"/>
                     <a:lstStyle/>
                     <a:p>
                       <a:pPr algn="ctr"/>
                       <a:r>
-                        <a:rPr sz="940" b="0">
+                        <a:rPr sz="1050" b="0">
                           <a:solidFill>
-                            <a:srgbClr val="02205B"/>
+                            <a:srgbClr val="061A4D"/>
                           </a:solidFill>
                           <a:latin typeface="Arial"/>
                         </a:rPr>
@@ -9172,18 +9147,18 @@
                 </a:tc>
                 <a:tc>
                   <a:txBody>
-                    <a:bodyPr anchor="ctr" wrap="square"/>
+                    <a:bodyPr anchor="ctr" wrap="square" lIns="38100" rIns="38100" tIns="12700" bIns="12700"/>
                     <a:lstStyle/>
                     <a:p>
                       <a:pPr algn="l"/>
                       <a:r>
-                        <a:rPr sz="940" b="0">
+                        <a:rPr sz="1050" b="0">
                           <a:solidFill>
-                            <a:srgbClr val="02205B"/>
+                            <a:srgbClr val="061A4D"/>
                           </a:solidFill>
                           <a:latin typeface="Arial"/>
                         </a:rPr>
-                        <a:t>лучший public среди финальных</a:t>
+                        <a:t>стабильный probability blend</a:t>
                       </a:r>
                     </a:p>
                   </a:txBody>
@@ -9197,18 +9172,18 @@
               <a:tr h="406400">
                 <a:tc>
                   <a:txBody>
-                    <a:bodyPr anchor="ctr" wrap="square"/>
+                    <a:bodyPr anchor="ctr" wrap="square" lIns="38100" rIns="38100" tIns="12700" bIns="12700"/>
                     <a:lstStyle/>
                     <a:p>
                       <a:pPr algn="l"/>
                       <a:r>
-                        <a:rPr sz="940" b="1">
+                        <a:rPr sz="1050" b="1">
                           <a:solidFill>
-                            <a:srgbClr val="02205B"/>
+                            <a:srgbClr val="061A4D"/>
                           </a:solidFill>
                           <a:latin typeface="Arial"/>
                         </a:rPr>
-                        <a:t>final_combo_variant_2</a:t>
+                        <a:t>LightGBM + XGBoost + CatBoost</a:t>
                       </a:r>
                     </a:p>
                   </a:txBody>
@@ -9220,14 +9195,14 @@
                 </a:tc>
                 <a:tc>
                   <a:txBody>
-                    <a:bodyPr anchor="ctr" wrap="square"/>
+                    <a:bodyPr anchor="ctr" wrap="square" lIns="38100" rIns="38100" tIns="12700" bIns="12700"/>
                     <a:lstStyle/>
                     <a:p>
                       <a:pPr algn="ctr"/>
                       <a:r>
-                        <a:rPr sz="940" b="0">
+                        <a:rPr sz="1050" b="0">
                           <a:solidFill>
-                            <a:srgbClr val="02205B"/>
+                            <a:srgbClr val="061A4D"/>
                           </a:solidFill>
                           <a:latin typeface="Arial"/>
                         </a:rPr>
@@ -9243,14 +9218,14 @@
                 </a:tc>
                 <a:tc>
                   <a:txBody>
-                    <a:bodyPr anchor="ctr" wrap="square"/>
+                    <a:bodyPr anchor="ctr" wrap="square" lIns="38100" rIns="38100" tIns="12700" bIns="12700"/>
                     <a:lstStyle/>
                     <a:p>
                       <a:pPr algn="ctr"/>
                       <a:r>
-                        <a:rPr sz="940" b="0">
+                        <a:rPr sz="1050" b="0">
                           <a:solidFill>
-                            <a:srgbClr val="02205B"/>
+                            <a:srgbClr val="061A4D"/>
                           </a:solidFill>
                           <a:latin typeface="Arial"/>
                         </a:rPr>
@@ -9266,18 +9241,18 @@
                 </a:tc>
                 <a:tc>
                   <a:txBody>
-                    <a:bodyPr anchor="ctr" wrap="square"/>
+                    <a:bodyPr anchor="ctr" wrap="square" lIns="38100" rIns="38100" tIns="12700" bIns="12700"/>
                     <a:lstStyle/>
                     <a:p>
                       <a:pPr algn="l"/>
                       <a:r>
-                        <a:rPr sz="940" b="0">
+                        <a:rPr sz="1050" b="0">
                           <a:solidFill>
-                            <a:srgbClr val="02205B"/>
+                            <a:srgbClr val="061A4D"/>
                           </a:solidFill>
                           <a:latin typeface="Arial"/>
                         </a:rPr>
-                        <a:t>близкий кандидат</a:t>
+                        <a:t>rank + probability mix</a:t>
                       </a:r>
                     </a:p>
                   </a:txBody>
@@ -9291,18 +9266,18 @@
               <a:tr h="406400">
                 <a:tc>
                   <a:txBody>
-                    <a:bodyPr anchor="ctr" wrap="square"/>
+                    <a:bodyPr anchor="ctr" wrap="square" lIns="38100" rIns="38100" tIns="12700" bIns="12700"/>
                     <a:lstStyle/>
                     <a:p>
                       <a:pPr algn="l"/>
                       <a:r>
-                        <a:rPr sz="940" b="1">
+                        <a:rPr sz="1050" b="1">
                           <a:solidFill>
-                            <a:srgbClr val="02205B"/>
+                            <a:srgbClr val="061A4D"/>
                           </a:solidFill>
                           <a:latin typeface="Arial"/>
                         </a:rPr>
-                        <a:t>final_combo_variant_3</a:t>
+                        <a:t>LightGBM-heavy ансамбль</a:t>
                       </a:r>
                     </a:p>
                   </a:txBody>
@@ -9314,14 +9289,14 @@
                 </a:tc>
                 <a:tc>
                   <a:txBody>
-                    <a:bodyPr anchor="ctr" wrap="square"/>
+                    <a:bodyPr anchor="ctr" wrap="square" lIns="38100" rIns="38100" tIns="12700" bIns="12700"/>
                     <a:lstStyle/>
                     <a:p>
                       <a:pPr algn="ctr"/>
                       <a:r>
-                        <a:rPr sz="940" b="0">
+                        <a:rPr sz="1050" b="0">
                           <a:solidFill>
-                            <a:srgbClr val="02205B"/>
+                            <a:srgbClr val="061A4D"/>
                           </a:solidFill>
                           <a:latin typeface="Arial"/>
                         </a:rPr>
@@ -9337,14 +9312,14 @@
                 </a:tc>
                 <a:tc>
                   <a:txBody>
-                    <a:bodyPr anchor="ctr" wrap="square"/>
+                    <a:bodyPr anchor="ctr" wrap="square" lIns="38100" rIns="38100" tIns="12700" bIns="12700"/>
                     <a:lstStyle/>
                     <a:p>
                       <a:pPr algn="ctr"/>
                       <a:r>
-                        <a:rPr sz="940" b="0">
+                        <a:rPr sz="1050" b="0">
                           <a:solidFill>
-                            <a:srgbClr val="02205B"/>
+                            <a:srgbClr val="061A4D"/>
                           </a:solidFill>
                           <a:latin typeface="Arial"/>
                         </a:rPr>
@@ -9360,18 +9335,18 @@
                 </a:tc>
                 <a:tc>
                   <a:txBody>
-                    <a:bodyPr anchor="ctr" wrap="square"/>
+                    <a:bodyPr anchor="ctr" wrap="square" lIns="38100" rIns="38100" tIns="12700" bIns="12700"/>
                     <a:lstStyle/>
                     <a:p>
                       <a:pPr algn="l"/>
                       <a:r>
-                        <a:rPr sz="940" b="0">
+                        <a:rPr sz="1050" b="0">
                           <a:solidFill>
-                            <a:srgbClr val="02205B"/>
+                            <a:srgbClr val="061A4D"/>
                           </a:solidFill>
                           <a:latin typeface="Arial"/>
                         </a:rPr>
-                        <a:t>стабильный кандидат</a:t>
+                        <a:t>взвешивание нескольких LGBM-веток</a:t>
                       </a:r>
                     </a:p>
                   </a:txBody>
@@ -9385,18 +9360,18 @@
               <a:tr h="406400">
                 <a:tc>
                   <a:txBody>
-                    <a:bodyPr anchor="ctr" wrap="square"/>
+                    <a:bodyPr anchor="ctr" wrap="square" lIns="38100" rIns="38100" tIns="12700" bIns="12700"/>
                     <a:lstStyle/>
                     <a:p>
                       <a:pPr algn="l"/>
                       <a:r>
-                        <a:rPr sz="940" b="1">
+                        <a:rPr sz="1050" b="1">
                           <a:solidFill>
-                            <a:srgbClr val="02205B"/>
+                            <a:srgbClr val="061A4D"/>
                           </a:solidFill>
                           <a:latin typeface="Arial"/>
                         </a:rPr>
-                        <a:t>final_combo_variant_4</a:t>
+                        <a:t>Разнородный blend: boosting + trees + AutoML</a:t>
                       </a:r>
                     </a:p>
                   </a:txBody>
@@ -9408,14 +9383,14 @@
                 </a:tc>
                 <a:tc>
                   <a:txBody>
-                    <a:bodyPr anchor="ctr" wrap="square"/>
+                    <a:bodyPr anchor="ctr" wrap="square" lIns="38100" rIns="38100" tIns="12700" bIns="12700"/>
                     <a:lstStyle/>
                     <a:p>
                       <a:pPr algn="ctr"/>
                       <a:r>
-                        <a:rPr sz="940" b="0">
+                        <a:rPr sz="1050" b="0">
                           <a:solidFill>
-                            <a:srgbClr val="02205B"/>
+                            <a:srgbClr val="061A4D"/>
                           </a:solidFill>
                           <a:latin typeface="Arial"/>
                         </a:rPr>
@@ -9431,14 +9406,14 @@
                 </a:tc>
                 <a:tc>
                   <a:txBody>
-                    <a:bodyPr anchor="ctr" wrap="square"/>
+                    <a:bodyPr anchor="ctr" wrap="square" lIns="38100" rIns="38100" tIns="12700" bIns="12700"/>
                     <a:lstStyle/>
                     <a:p>
                       <a:pPr algn="ctr"/>
                       <a:r>
-                        <a:rPr sz="940" b="0">
+                        <a:rPr sz="1050" b="0">
                           <a:solidFill>
-                            <a:srgbClr val="02205B"/>
+                            <a:srgbClr val="061A4D"/>
                           </a:solidFill>
                           <a:latin typeface="Arial"/>
                         </a:rPr>
@@ -9454,18 +9429,18 @@
                 </a:tc>
                 <a:tc>
                   <a:txBody>
-                    <a:bodyPr anchor="ctr" wrap="square"/>
+                    <a:bodyPr anchor="ctr" wrap="square" lIns="38100" rIns="38100" tIns="12700" bIns="12700"/>
                     <a:lstStyle/>
                     <a:p>
                       <a:pPr algn="l"/>
                       <a:r>
-                        <a:rPr sz="940" b="0">
+                        <a:rPr sz="1050" b="0">
                           <a:solidFill>
-                            <a:srgbClr val="02205B"/>
+                            <a:srgbClr val="061A4D"/>
                           </a:solidFill>
                           <a:latin typeface="Arial"/>
                         </a:rPr>
-                        <a:t>близко к топу</a:t>
+                        <a:t>консервативные веса для diversity</a:t>
                       </a:r>
                     </a:p>
                   </a:txBody>
@@ -9479,18 +9454,18 @@
               <a:tr h="406400">
                 <a:tc>
                   <a:txBody>
-                    <a:bodyPr anchor="ctr" wrap="square"/>
+                    <a:bodyPr anchor="ctr" wrap="square" lIns="38100" rIns="38100" tIns="12700" bIns="12700"/>
                     <a:lstStyle/>
                     <a:p>
                       <a:pPr algn="l"/>
                       <a:r>
-                        <a:rPr sz="940" b="1">
+                        <a:rPr sz="1050" b="0">
                           <a:solidFill>
-                            <a:srgbClr val="02205B"/>
+                            <a:srgbClr val="061A4D"/>
                           </a:solidFill>
                           <a:latin typeface="Arial"/>
                         </a:rPr>
-                        <a:t>logistic_stacker_probability</a:t>
+                        <a:t>OOF logistic stacker: LGBM / XGB / CatBoost / ExtraTrees</a:t>
                       </a:r>
                     </a:p>
                   </a:txBody>
@@ -9502,14 +9477,14 @@
                 </a:tc>
                 <a:tc>
                   <a:txBody>
-                    <a:bodyPr anchor="ctr" wrap="square"/>
+                    <a:bodyPr anchor="ctr" wrap="square" lIns="38100" rIns="38100" tIns="12700" bIns="12700"/>
                     <a:lstStyle/>
                     <a:p>
                       <a:pPr algn="ctr"/>
                       <a:r>
-                        <a:rPr sz="940" b="0">
+                        <a:rPr sz="1050" b="0">
                           <a:solidFill>
-                            <a:srgbClr val="02205B"/>
+                            <a:srgbClr val="061A4D"/>
                           </a:solidFill>
                           <a:latin typeface="Arial"/>
                         </a:rPr>
@@ -9525,14 +9500,14 @@
                 </a:tc>
                 <a:tc>
                   <a:txBody>
-                    <a:bodyPr anchor="ctr" wrap="square"/>
+                    <a:bodyPr anchor="ctr" wrap="square" lIns="38100" rIns="38100" tIns="12700" bIns="12700"/>
                     <a:lstStyle/>
                     <a:p>
                       <a:pPr algn="ctr"/>
                       <a:r>
-                        <a:rPr sz="940" b="0">
+                        <a:rPr sz="1050" b="0">
                           <a:solidFill>
-                            <a:srgbClr val="02205B"/>
+                            <a:srgbClr val="061A4D"/>
                           </a:solidFill>
                           <a:latin typeface="Arial"/>
                         </a:rPr>
@@ -9548,18 +9523,18 @@
                 </a:tc>
                 <a:tc>
                   <a:txBody>
-                    <a:bodyPr anchor="ctr" wrap="square"/>
+                    <a:bodyPr anchor="ctr" wrap="square" lIns="38100" rIns="38100" tIns="12700" bIns="12700"/>
                     <a:lstStyle/>
                     <a:p>
                       <a:pPr algn="l"/>
                       <a:r>
-                        <a:rPr sz="940" b="0">
+                        <a:rPr sz="1050" b="0">
                           <a:solidFill>
-                            <a:srgbClr val="02205B"/>
+                            <a:srgbClr val="061A4D"/>
                           </a:solidFill>
                           <a:latin typeface="Arial"/>
                         </a:rPr>
-                        <a:t>OOF stacker</a:t>
+                        <a:t>логистическая регрессия по OOF-прогнозам</a:t>
                       </a:r>
                     </a:p>
                   </a:txBody>
@@ -9573,18 +9548,18 @@
               <a:tr h="406400">
                 <a:tc>
                   <a:txBody>
-                    <a:bodyPr anchor="ctr" wrap="square"/>
+                    <a:bodyPr anchor="ctr" wrap="square" lIns="38100" rIns="38100" tIns="12700" bIns="12700"/>
                     <a:lstStyle/>
                     <a:p>
                       <a:pPr algn="l"/>
                       <a:r>
-                        <a:rPr sz="940" b="1">
+                        <a:rPr sz="1050" b="0">
                           <a:solidFill>
-                            <a:srgbClr val="02205B"/>
+                            <a:srgbClr val="061A4D"/>
                           </a:solidFill>
                           <a:latin typeface="Arial"/>
                         </a:rPr>
-                        <a:t>logistic_stacker_rank</a:t>
+                        <a:t>Rank-space stacker: те же базовые модели</a:t>
                       </a:r>
                     </a:p>
                   </a:txBody>
@@ -9596,14 +9571,14 @@
                 </a:tc>
                 <a:tc>
                   <a:txBody>
-                    <a:bodyPr anchor="ctr" wrap="square"/>
+                    <a:bodyPr anchor="ctr" wrap="square" lIns="38100" rIns="38100" tIns="12700" bIns="12700"/>
                     <a:lstStyle/>
                     <a:p>
                       <a:pPr algn="ctr"/>
                       <a:r>
-                        <a:rPr sz="940" b="0">
+                        <a:rPr sz="1050" b="0">
                           <a:solidFill>
-                            <a:srgbClr val="02205B"/>
+                            <a:srgbClr val="061A4D"/>
                           </a:solidFill>
                           <a:latin typeface="Arial"/>
                         </a:rPr>
@@ -9619,14 +9594,14 @@
                 </a:tc>
                 <a:tc>
                   <a:txBody>
-                    <a:bodyPr anchor="ctr" wrap="square"/>
+                    <a:bodyPr anchor="ctr" wrap="square" lIns="38100" rIns="38100" tIns="12700" bIns="12700"/>
                     <a:lstStyle/>
                     <a:p>
                       <a:pPr algn="ctr"/>
                       <a:r>
-                        <a:rPr sz="940" b="0">
+                        <a:rPr sz="1050" b="0">
                           <a:solidFill>
-                            <a:srgbClr val="02205B"/>
+                            <a:srgbClr val="061A4D"/>
                           </a:solidFill>
                           <a:latin typeface="Arial"/>
                         </a:rPr>
@@ -9642,18 +9617,18 @@
                 </a:tc>
                 <a:tc>
                   <a:txBody>
-                    <a:bodyPr anchor="ctr" wrap="square"/>
+                    <a:bodyPr anchor="ctr" wrap="square" lIns="38100" rIns="38100" tIns="12700" bIns="12700"/>
                     <a:lstStyle/>
                     <a:p>
                       <a:pPr algn="l"/>
                       <a:r>
-                        <a:rPr sz="940" b="0">
+                        <a:rPr sz="1050" b="0">
                           <a:solidFill>
-                            <a:srgbClr val="02205B"/>
+                            <a:srgbClr val="061A4D"/>
                           </a:solidFill>
                           <a:latin typeface="Arial"/>
                         </a:rPr>
-                        <a:t>rank stacker</a:t>
+                        <a:t>стеккинг по рангам прогнозов</a:t>
                       </a:r>
                     </a:p>
                   </a:txBody>
@@ -9667,18 +9642,18 @@
               <a:tr h="406400">
                 <a:tc>
                   <a:txBody>
-                    <a:bodyPr anchor="ctr" wrap="square"/>
+                    <a:bodyPr anchor="ctr" wrap="square" lIns="38100" rIns="38100" tIns="12700" bIns="12700"/>
                     <a:lstStyle/>
                     <a:p>
                       <a:pPr algn="l"/>
                       <a:r>
-                        <a:rPr sz="940" b="1">
+                        <a:rPr sz="1050" b="0">
                           <a:solidFill>
-                            <a:srgbClr val="02205B"/>
+                            <a:srgbClr val="061A4D"/>
                           </a:solidFill>
                           <a:latin typeface="Arial"/>
                         </a:rPr>
-                        <a:t>random_search_prob</a:t>
+                        <a:t>Random-search blend top моделей</a:t>
                       </a:r>
                     </a:p>
                   </a:txBody>
@@ -9690,14 +9665,14 @@
                 </a:tc>
                 <a:tc>
                   <a:txBody>
-                    <a:bodyPr anchor="ctr" wrap="square"/>
+                    <a:bodyPr anchor="ctr" wrap="square" lIns="38100" rIns="38100" tIns="12700" bIns="12700"/>
                     <a:lstStyle/>
                     <a:p>
                       <a:pPr algn="ctr"/>
                       <a:r>
-                        <a:rPr sz="940" b="0">
+                        <a:rPr sz="1050" b="0">
                           <a:solidFill>
-                            <a:srgbClr val="02205B"/>
+                            <a:srgbClr val="061A4D"/>
                           </a:solidFill>
                           <a:latin typeface="Arial"/>
                         </a:rPr>
@@ -9713,14 +9688,14 @@
                 </a:tc>
                 <a:tc>
                   <a:txBody>
-                    <a:bodyPr anchor="ctr" wrap="square"/>
+                    <a:bodyPr anchor="ctr" wrap="square" lIns="38100" rIns="38100" tIns="12700" bIns="12700"/>
                     <a:lstStyle/>
                     <a:p>
                       <a:pPr algn="ctr"/>
                       <a:r>
-                        <a:rPr sz="940" b="0">
+                        <a:rPr sz="1050" b="0">
                           <a:solidFill>
-                            <a:srgbClr val="02205B"/>
+                            <a:srgbClr val="061A4D"/>
                           </a:solidFill>
                           <a:latin typeface="Arial"/>
                         </a:rPr>
@@ -9736,18 +9711,18 @@
                 </a:tc>
                 <a:tc>
                   <a:txBody>
-                    <a:bodyPr anchor="ctr" wrap="square"/>
+                    <a:bodyPr anchor="ctr" wrap="square" lIns="38100" rIns="38100" tIns="12700" bIns="12700"/>
                     <a:lstStyle/>
                     <a:p>
                       <a:pPr algn="l"/>
                       <a:r>
-                        <a:rPr sz="940" b="0">
+                        <a:rPr sz="1050" b="0">
                           <a:solidFill>
-                            <a:srgbClr val="02205B"/>
+                            <a:srgbClr val="061A4D"/>
                           </a:solidFill>
                           <a:latin typeface="Arial"/>
                         </a:rPr>
-                        <a:t>OOF random-search blend</a:t>
+                        <a:t>поиск весов по OOF ROC-AUC</a:t>
                       </a:r>
                     </a:p>
                   </a:txBody>
@@ -10087,14 +10062,14 @@
               <a:tr h="502920">
                 <a:tc>
                   <a:txBody>
-                    <a:bodyPr anchor="ctr" wrap="square"/>
+                    <a:bodyPr anchor="ctr" wrap="square" lIns="38100" rIns="38100" tIns="12700" bIns="12700"/>
                     <a:lstStyle/>
                     <a:p>
                       <a:pPr algn="ctr"/>
                       <a:r>
-                        <a:rPr sz="1250" b="1">
+                        <a:rPr sz="1300" b="1">
                           <a:solidFill>
-                            <a:srgbClr val="02205B"/>
+                            <a:srgbClr val="061A4D"/>
                           </a:solidFill>
                           <a:latin typeface="Arial"/>
                         </a:rPr>
@@ -10110,14 +10085,14 @@
                 </a:tc>
                 <a:tc>
                   <a:txBody>
-                    <a:bodyPr anchor="ctr" wrap="square"/>
+                    <a:bodyPr anchor="ctr" wrap="square" lIns="38100" rIns="38100" tIns="12700" bIns="12700"/>
                     <a:lstStyle/>
                     <a:p>
                       <a:pPr algn="ctr"/>
                       <a:r>
-                        <a:rPr sz="1250" b="1">
+                        <a:rPr sz="1300" b="1">
                           <a:solidFill>
-                            <a:srgbClr val="02205B"/>
+                            <a:srgbClr val="061A4D"/>
                           </a:solidFill>
                           <a:latin typeface="Arial"/>
                         </a:rPr>
@@ -10133,14 +10108,14 @@
                 </a:tc>
                 <a:tc>
                   <a:txBody>
-                    <a:bodyPr anchor="ctr" wrap="square"/>
+                    <a:bodyPr anchor="ctr" wrap="square" lIns="38100" rIns="38100" tIns="12700" bIns="12700"/>
                     <a:lstStyle/>
                     <a:p>
                       <a:pPr algn="ctr"/>
                       <a:r>
-                        <a:rPr sz="1250" b="1">
+                        <a:rPr sz="1300" b="1">
                           <a:solidFill>
-                            <a:srgbClr val="02205B"/>
+                            <a:srgbClr val="061A4D"/>
                           </a:solidFill>
                           <a:latin typeface="Arial"/>
                         </a:rPr>
@@ -10158,18 +10133,18 @@
               <a:tr h="502920">
                 <a:tc>
                   <a:txBody>
-                    <a:bodyPr anchor="ctr" wrap="square"/>
+                    <a:bodyPr anchor="ctr" wrap="square" lIns="38100" rIns="38100" tIns="12700" bIns="12700"/>
                     <a:lstStyle/>
                     <a:p>
                       <a:pPr algn="l"/>
                       <a:r>
-                        <a:rPr sz="1220" b="1">
+                        <a:rPr sz="1200" b="1">
                           <a:solidFill>
-                            <a:srgbClr val="02205B"/>
+                            <a:srgbClr val="061A4D"/>
                           </a:solidFill>
                           <a:latin typeface="Arial"/>
                         </a:rPr>
-                        <a:t>Лучший одиночный submit</a:t>
+                        <a:t>Лучшая одиночная модель</a:t>
                       </a:r>
                     </a:p>
                   </a:txBody>
@@ -10181,14 +10156,14 @@
                 </a:tc>
                 <a:tc>
                   <a:txBody>
-                    <a:bodyPr anchor="ctr" wrap="square"/>
+                    <a:bodyPr anchor="ctr" wrap="square" lIns="38100" rIns="38100" tIns="12700" bIns="12700"/>
                     <a:lstStyle/>
                     <a:p>
                       <a:pPr algn="ctr"/>
                       <a:r>
-                        <a:rPr sz="1220" b="0">
+                        <a:rPr sz="1200" b="0">
                           <a:solidFill>
-                            <a:srgbClr val="02205B"/>
+                            <a:srgbClr val="061A4D"/>
                           </a:solidFill>
                           <a:latin typeface="Arial"/>
                         </a:rPr>
@@ -10204,18 +10179,18 @@
                 </a:tc>
                 <a:tc>
                   <a:txBody>
-                    <a:bodyPr anchor="ctr" wrap="square"/>
+                    <a:bodyPr anchor="ctr" wrap="square" lIns="38100" rIns="38100" tIns="12700" bIns="12700"/>
                     <a:lstStyle/>
                     <a:p>
-                      <a:pPr algn="ctr"/>
+                      <a:pPr algn="l"/>
                       <a:r>
-                        <a:rPr sz="1220" b="0">
+                        <a:rPr sz="1200" b="0">
                           <a:solidFill>
-                            <a:srgbClr val="02205B"/>
+                            <a:srgbClr val="061A4D"/>
                           </a:solidFill>
                           <a:latin typeface="Arial"/>
                         </a:rPr>
-                        <a:t>LightGBM top500 engineered</a:t>
+                        <a:t>LightGBM на top500 engineered-признаках</a:t>
                       </a:r>
                     </a:p>
                   </a:txBody>
@@ -10229,18 +10204,18 @@
               <a:tr h="502920">
                 <a:tc>
                   <a:txBody>
-                    <a:bodyPr anchor="ctr" wrap="square"/>
+                    <a:bodyPr anchor="ctr" wrap="square" lIns="38100" rIns="38100" tIns="12700" bIns="12700"/>
                     <a:lstStyle/>
                     <a:p>
                       <a:pPr algn="l"/>
                       <a:r>
-                        <a:rPr sz="1220" b="1">
+                        <a:rPr sz="1200" b="1">
                           <a:solidFill>
-                            <a:srgbClr val="02205B"/>
+                            <a:srgbClr val="061A4D"/>
                           </a:solidFill>
                           <a:latin typeface="Arial"/>
                         </a:rPr>
-                        <a:t>Лучший blend/stacker без финальной комбинации</a:t>
+                        <a:t>Сильные одиночные модели</a:t>
                       </a:r>
                     </a:p>
                   </a:txBody>
@@ -10252,18 +10227,18 @@
                 </a:tc>
                 <a:tc>
                   <a:txBody>
-                    <a:bodyPr anchor="ctr" wrap="square"/>
+                    <a:bodyPr anchor="ctr" wrap="square" lIns="38100" rIns="38100" tIns="12700" bIns="12700"/>
                     <a:lstStyle/>
                     <a:p>
                       <a:pPr algn="ctr"/>
                       <a:r>
-                        <a:rPr sz="1220" b="0">
+                        <a:rPr sz="1200" b="0">
                           <a:solidFill>
-                            <a:srgbClr val="02205B"/>
+                            <a:srgbClr val="061A4D"/>
                           </a:solidFill>
                           <a:latin typeface="Arial"/>
                         </a:rPr>
-                        <a:t>0.68943 / 0.68882</a:t>
+                        <a:t>≈ 0.683–0.689</a:t>
                       </a:r>
                     </a:p>
                   </a:txBody>
@@ -10275,18 +10250,18 @@
                 </a:tc>
                 <a:tc>
                   <a:txBody>
-                    <a:bodyPr anchor="ctr" wrap="square"/>
+                    <a:bodyPr anchor="ctr" wrap="square" lIns="38100" rIns="38100" tIns="12700" bIns="12700"/>
                     <a:lstStyle/>
                     <a:p>
-                      <a:pPr algn="ctr"/>
+                      <a:pPr algn="l"/>
                       <a:r>
-                        <a:rPr sz="1220" b="0">
+                        <a:rPr sz="1200" b="0">
                           <a:solidFill>
-                            <a:srgbClr val="02205B"/>
+                            <a:srgbClr val="061A4D"/>
                           </a:solidFill>
                           <a:latin typeface="Arial"/>
                         </a:rPr>
-                        <a:t>logistic stacker / probability stacker</a:t>
+                        <a:t>LightGBM DART, XGBoost, CatBoost, ExtraTrees</a:t>
                       </a:r>
                     </a:p>
                   </a:txBody>
@@ -10300,14 +10275,14 @@
               <a:tr h="502920">
                 <a:tc>
                   <a:txBody>
-                    <a:bodyPr anchor="ctr" wrap="square"/>
+                    <a:bodyPr anchor="ctr" wrap="square" lIns="38100" rIns="38100" tIns="12700" bIns="12700"/>
                     <a:lstStyle/>
                     <a:p>
                       <a:pPr algn="l"/>
                       <a:r>
-                        <a:rPr sz="1220" b="1">
+                        <a:rPr sz="1200" b="1">
                           <a:solidFill>
-                            <a:srgbClr val="02205B"/>
+                            <a:srgbClr val="061A4D"/>
                           </a:solidFill>
                           <a:latin typeface="Arial"/>
                         </a:rPr>
@@ -10323,14 +10298,14 @@
                 </a:tc>
                 <a:tc>
                   <a:txBody>
-                    <a:bodyPr anchor="ctr" wrap="square"/>
+                    <a:bodyPr anchor="ctr" wrap="square" lIns="38100" rIns="38100" tIns="12700" bIns="12700"/>
                     <a:lstStyle/>
                     <a:p>
                       <a:pPr algn="ctr"/>
                       <a:r>
-                        <a:rPr sz="1220" b="0">
+                        <a:rPr sz="1200" b="0">
                           <a:solidFill>
-                            <a:srgbClr val="02205B"/>
+                            <a:srgbClr val="061A4D"/>
                           </a:solidFill>
                           <a:latin typeface="Arial"/>
                         </a:rPr>
@@ -10346,18 +10321,18 @@
                 </a:tc>
                 <a:tc>
                   <a:txBody>
-                    <a:bodyPr anchor="ctr" wrap="square"/>
+                    <a:bodyPr anchor="ctr" wrap="square" lIns="38100" rIns="38100" tIns="12700" bIns="12700"/>
                     <a:lstStyle/>
                     <a:p>
-                      <a:pPr algn="ctr"/>
+                      <a:pPr algn="l"/>
                       <a:r>
-                        <a:rPr sz="1220" b="0">
+                        <a:rPr sz="1200" b="0">
                           <a:solidFill>
-                            <a:srgbClr val="02205B"/>
+                            <a:srgbClr val="061A4D"/>
                           </a:solidFill>
                           <a:latin typeface="Arial"/>
                         </a:rPr>
-                        <a:t>стабильная группа близких решений</a:t>
+                        <a:t>probability/rank blends разнородных моделей</a:t>
                       </a:r>
                     </a:p>
                   </a:txBody>
@@ -10371,14 +10346,14 @@
               <a:tr h="502920">
                 <a:tc>
                   <a:txBody>
-                    <a:bodyPr anchor="ctr" wrap="square"/>
+                    <a:bodyPr anchor="ctr" wrap="square" lIns="38100" rIns="38100" tIns="12700" bIns="12700"/>
                     <a:lstStyle/>
                     <a:p>
                       <a:pPr algn="l"/>
                       <a:r>
-                        <a:rPr sz="1220" b="1">
+                        <a:rPr sz="1200" b="1">
                           <a:solidFill>
-                            <a:srgbClr val="02205B"/>
+                            <a:srgbClr val="061A4D"/>
                           </a:solidFill>
                           <a:latin typeface="Arial"/>
                         </a:rPr>
@@ -10394,14 +10369,14 @@
                 </a:tc>
                 <a:tc>
                   <a:txBody>
-                    <a:bodyPr anchor="ctr" wrap="square"/>
+                    <a:bodyPr anchor="ctr" wrap="square" lIns="38100" rIns="38100" tIns="12700" bIns="12700"/>
                     <a:lstStyle/>
                     <a:p>
                       <a:pPr algn="ctr"/>
                       <a:r>
-                        <a:rPr sz="1220" b="0">
+                        <a:rPr sz="1200" b="0">
                           <a:solidFill>
-                            <a:srgbClr val="02205B"/>
+                            <a:srgbClr val="061A4D"/>
                           </a:solidFill>
                           <a:latin typeface="Arial"/>
                         </a:rPr>
@@ -10417,18 +10392,18 @@
                 </a:tc>
                 <a:tc>
                   <a:txBody>
-                    <a:bodyPr anchor="ctr" wrap="square"/>
+                    <a:bodyPr anchor="ctr" wrap="square" lIns="38100" rIns="38100" tIns="12700" bIns="12700"/>
                     <a:lstStyle/>
                     <a:p>
-                      <a:pPr algn="ctr"/>
+                      <a:pPr algn="l"/>
                       <a:r>
-                        <a:rPr sz="1220" b="0">
+                        <a:rPr sz="1200" b="0">
                           <a:solidFill>
-                            <a:srgbClr val="02205B"/>
+                            <a:srgbClr val="061A4D"/>
                           </a:solidFill>
                           <a:latin typeface="Arial"/>
                         </a:rPr>
-                        <a:t>ансамблирование реально добавило качество</a:t>
+                        <a:t>ансамбль добавил качество за счёт разных ошибок</a:t>
                       </a:r>
                     </a:p>
                   </a:txBody>
@@ -11228,77 +11203,67 @@
             <a:r>
               <a:rPr sz="1500">
                 <a:solidFill>
-                  <a:srgbClr val="02205B"/>
+                  <a:srgbClr val="061A4D"/>
                 </a:solidFill>
                 <a:latin typeface="Arial"/>
               </a:rPr>
               <a:t>Построен полный ML-пайплайн для табличной задачи бинарной классификации с сильным дисбалансом классов.</a:t>
             </a:r>
           </a:p>
+          <a:p/>
           <a:p>
             <a:r>
               <a:rPr sz="1500">
                 <a:solidFill>
-                  <a:srgbClr val="02205B"/>
-                </a:solidFill>
-                <a:latin typeface="Arial"/>
-              </a:rPr>
-              <a:t/>
+                  <a:srgbClr val="061A4D"/>
+                </a:solidFill>
+                <a:latin typeface="Arial"/>
+              </a:rPr>
+              <a:t>1. EDA показал слабый одиночный сигнал, избыточность признаков и важность нелинейных комбинаций.</a:t>
             </a:r>
           </a:p>
           <a:p>
             <a:r>
               <a:rPr sz="1500">
                 <a:solidFill>
-                  <a:srgbClr val="02205B"/>
-                </a:solidFill>
-                <a:latin typeface="Arial"/>
-              </a:rPr>
-              <a:t>1. EDA показал слабый одиночный сигнал, избыточность признаков и важность нелинейных комбинаций.</a:t>
+                  <a:srgbClr val="061A4D"/>
+                </a:solidFill>
+                <a:latin typeface="Arial"/>
+              </a:rPr>
+              <a:t>2. Feature engineering дал несколько полезных пространств признаков вместо одного универсального набора.</a:t>
             </a:r>
           </a:p>
           <a:p>
             <a:r>
               <a:rPr sz="1500">
                 <a:solidFill>
-                  <a:srgbClr val="02205B"/>
-                </a:solidFill>
-                <a:latin typeface="Arial"/>
-              </a:rPr>
-              <a:t>2. Feature engineering дал несколько полезных пространств признаков вместо одного универсального набора.</a:t>
+                  <a:srgbClr val="061A4D"/>
+                </a:solidFill>
+                <a:latin typeface="Arial"/>
+              </a:rPr>
+              <a:t>3. Лучший одиночный submit на private test: 0.69074 ROC-AUC.</a:t>
             </a:r>
           </a:p>
           <a:p>
             <a:r>
               <a:rPr sz="1500">
                 <a:solidFill>
-                  <a:srgbClr val="02205B"/>
-                </a:solidFill>
-                <a:latin typeface="Arial"/>
-              </a:rPr>
-              <a:t>3. Лучший одиночный submit на private test: 0.69074 ROC-AUC.</a:t>
+                  <a:srgbClr val="061A4D"/>
+                </a:solidFill>
+                <a:latin typeface="Arial"/>
+              </a:rPr>
+              <a:t>4. Лучшие финальные комбинации моделей: до 0.70393 private ROC-AUC.</a:t>
             </a:r>
           </a:p>
           <a:p>
             <a:r>
               <a:rPr sz="1500">
                 <a:solidFill>
-                  <a:srgbClr val="02205B"/>
-                </a:solidFill>
-                <a:latin typeface="Arial"/>
-              </a:rPr>
-              <a:t>4. Лучшие финальные комбинации: до 0.70393 private ROC-AUC.</a:t>
-            </a:r>
-          </a:p>
-          <a:p>
-            <a:r>
-              <a:rPr sz="1500">
-                <a:solidFill>
-                  <a:srgbClr val="02205B"/>
-                </a:solidFill>
-                <a:latin typeface="Arial"/>
-              </a:rPr>
-              <a:t>5. Основной вклад дали разнородные модели, аккуратные признаки и ансамблирование по устойчивым кандидатам.</a:t>
+                  <a:srgbClr val="061A4D"/>
+                </a:solidFill>
+                <a:latin typeface="Arial"/>
+              </a:rPr>
+              <a:t>5. Основной вклад дали разнородные бустинги, rank/probability blending и аккуратный контроль валидации.</a:t>
             </a:r>
           </a:p>
         </p:txBody>
